--- a/presentation/deck.pptx
+++ b/presentation/deck.pptx
@@ -5919,7 +5919,7 @@
                           </a:solidFill>
                           <a:latin typeface="Segoe UI"/>
                         </a:rPr>
-                        <a:t>плавающие предметы &gt; 10 см</a:t>
+                        <a:t>все плавающие предметы &gt; 10 см (не только пластик)</a:t>
                       </a:r>
                     </a:p>
                   </a:txBody>
@@ -6377,7 +6377,7 @@
                 </a:solidFill>
                 <a:latin typeface="Segoe UI"/>
               </a:rPr>
-              <a:t>Источник: presentation/img/*.png (presentation/make_shots.py, http://localhost:8070, 1920×1080); docs/CONTRACTS_V3.md</a:t>
+              <a:t>Источник: presentation/img/*.jpg (presentation/make_shots.py, http://localhost:8070, 1920×1080); docs/CONTRACTS_V3.md</a:t>
             </a:r>
           </a:p>
         </p:txBody>
@@ -16889,7 +16889,7 @@
                 </a:solidFill>
                 <a:latin typeface="Segoe UI"/>
               </a:rPr>
-              <a:t>шт./км², ADIS, предметы &gt; 10 см [1.52–1.56]; калибровка авторов по тралу — 4.64</a:t>
+              <a:t>шт./км², ADIS: все предметы &gt; 10 см (не только пластик), измерение ΣN/ΣA [1.52–1.56]; калибровка авторов по тралу — 4.64</a:t>
             </a:r>
           </a:p>
         </p:txBody>
@@ -18564,7 +18564,7 @@
                 </a:solidFill>
                 <a:latin typeface="Segoe UI"/>
               </a:rPr>
-              <a:t>Источник: presentation/img/*.png (presentation/make_shots.py, http://localhost:8070, 1920×1080, без фикстур); docs/DEMO.md</a:t>
+              <a:t>Источник: presentation/img/*.jpg (presentation/make_shots.py, http://localhost:8070, 1920×1080, без фикстур); docs/DEMO.md</a:t>
             </a:r>
           </a:p>
         </p:txBody>

--- a/presentation/deck.pptx
+++ b/presentation/deck.pptx
@@ -831,13 +831,13 @@
           <a:lstStyle/>
           <a:p>
             <a:r>
-              <a:t>[3:57–4:10] Всё воспроизводится одной командой без сети за 11.5 секунды, чистый клон до карты — 7,5 минуты, числа в README, отчёте и этой презентации сверяет тест. Спасибо, готовы к вопросам.</a:t>
+              <a:t>[3:57–4:10] Всё воспроизводится одной командой без сети за 7.5 секунды, чистый клон до карты — 7,5 минуты, числа в README, отчёте и этой презентации сверяет тест. Спасибо, готовы к вопросам.</a:t>
             </a:r>
           </a:p>
           <a:p/>
           <a:p>
             <a:r>
-              <a:t>Если спросят: Тесты кейса (26.09.2026 09:46): 255 passed. Приложение — подробные слайды для вопросов.</a:t>
+              <a:t>Если спросят: Тесты кейса (26.09.2026 11:15): 255 passed. Приложение — подробные слайды для вопросов.</a:t>
             </a:r>
           </a:p>
         </p:txBody>
@@ -7334,7 +7334,7 @@
                 </a:solidFill>
                 <a:latin typeface="Segoe UI"/>
               </a:rPr>
-              <a:t>Одна команда без сети — 11.5 с; чистый клон до карты — 7,5 мин; числа из одного файла</a:t>
+              <a:t>Одна команда без сети — 7.5 с; чистый клон до карты — 7,5 мин; числа из одного файла</a:t>
             </a:r>
           </a:p>
         </p:txBody>
@@ -7417,7 +7417,7 @@
                 </a:solidFill>
                 <a:latin typeface="Segoe UI"/>
               </a:rPr>
-              <a:t>11.5 с</a:t>
+              <a:t>7.5 с</a:t>
             </a:r>
           </a:p>
         </p:txBody>
@@ -7755,7 +7755,7 @@
                 </a:solidFill>
                 <a:latin typeface="Segoe UI"/>
               </a:rPr>
-              <a:t>• Все числа — reports/final_numbers.json; отпечаток прогона 3db680b6661e86d3</a:t>
+              <a:t>• Все числа — reports/final_numbers.json; отпечаток прогона 278d93fb3390edeb</a:t>
             </a:r>
           </a:p>
           <a:p>
@@ -18013,7 +18013,7 @@
                 </a:solidFill>
                 <a:latin typeface="Segoe UI"/>
               </a:rPr>
-              <a:t>78</a:t>
+              <a:t>77</a:t>
             </a:r>
           </a:p>
         </p:txBody>
@@ -18052,7 +18052,7 @@
                 </a:solidFill>
                 <a:latin typeface="Segoe UI"/>
               </a:rPr>
-              <a:t>находок детектора на 75 сценах: 14 совпали с Cózar, 64 требуют проверки; ещё 180 — недостаточно данных или ложные, 28 — не обнаружено</a:t>
+              <a:t>находок детектора на 75 сценах (14 совпали с Cózar; на снимках из обучения MARIDA не считаем — 1); ещё 180 — недостаточно данных или ложные, 28 — не обнаружено</a:t>
             </a:r>
           </a:p>
         </p:txBody>

--- a/presentation/deck.pptx
+++ b/presentation/deck.pptx
@@ -6134,7 +6134,7 @@
                 </a:solidFill>
                 <a:latin typeface="Segoe UI"/>
               </a:rPr>
-              <a:t>10 · Сервис: фото и выгрузка</a:t>
+              <a:t>10 · Сервис: фото, метрики, выгрузка</a:t>
             </a:r>
           </a:p>
         </p:txBody>
@@ -6173,7 +6173,7 @@
                 </a:solidFill>
                 <a:latin typeface="Segoe UI"/>
               </a:rPr>
-              <a:t>Счётчик по фото и выгрузка: зоны отложенной сцены на карте = CSV = GeoJSON (23 = 23 = 23)</a:t>
+              <a:t>Фото, метрики, выгрузка: зоны отложенной сцены на карте = CSV = GeoJSON (23 = 23 = 23)</a:t>
             </a:r>
           </a:p>
         </p:txBody>
@@ -6195,7 +6195,7 @@
         <p:spPr>
           <a:xfrm>
             <a:off x="457200" y="1600200"/>
-            <a:ext cx="5486400" cy="3086100"/>
+            <a:ext cx="3566160" cy="2005965"/>
           </a:xfrm>
           <a:prstGeom prst="rect">
             <a:avLst/>
@@ -6210,8 +6210,8 @@
         </p:nvSpPr>
         <p:spPr>
           <a:xfrm>
-            <a:off x="457200" y="4759452"/>
-            <a:ext cx="5486400" cy="640080"/>
+            <a:off x="457200" y="3679316"/>
+            <a:ext cx="3566160" cy="640080"/>
           </a:xfrm>
           <a:prstGeom prst="rect">
             <a:avLst/>
@@ -6243,7 +6243,7 @@
       </p:sp>
       <p:pic>
         <p:nvPicPr>
-          <p:cNvPr id="6" name="Picture 5" descr="24_svc_export.jpg"/>
+          <p:cNvPr id="6" name="Picture 5" descr="27_svc_metrics.jpg"/>
           <p:cNvPicPr>
             <a:picLocks noChangeAspect="1"/>
           </p:cNvPicPr>
@@ -6257,8 +6257,8 @@
         </p:blipFill>
         <p:spPr>
           <a:xfrm>
-            <a:off x="6217920" y="1600200"/>
-            <a:ext cx="5486400" cy="3086100"/>
+            <a:off x="4297680" y="1600200"/>
+            <a:ext cx="3566160" cy="3413324"/>
           </a:xfrm>
           <a:prstGeom prst="rect">
             <a:avLst/>
@@ -6273,8 +6273,8 @@
         </p:nvSpPr>
         <p:spPr>
           <a:xfrm>
-            <a:off x="6217920" y="4759452"/>
-            <a:ext cx="5486400" cy="640080"/>
+            <a:off x="4297680" y="5086676"/>
+            <a:ext cx="3566160" cy="640080"/>
           </a:xfrm>
           <a:prstGeom prst="rect">
             <a:avLst/>
@@ -6299,6 +6299,69 @@
                 </a:solidFill>
                 <a:latin typeface="Segoe UI"/>
               </a:rPr>
+              <a:t>«Метрики»: F1 детектора и отложенный test концентрации против медианы</a:t>
+            </a:r>
+          </a:p>
+        </p:txBody>
+      </p:sp>
+      <p:pic>
+        <p:nvPicPr>
+          <p:cNvPr id="8" name="Picture 7" descr="24_svc_export.jpg"/>
+          <p:cNvPicPr>
+            <a:picLocks noChangeAspect="1"/>
+          </p:cNvPicPr>
+          <p:nvPr/>
+        </p:nvPicPr>
+        <p:blipFill>
+          <a:blip r:embed="rId4"/>
+          <a:stretch>
+            <a:fillRect/>
+          </a:stretch>
+        </p:blipFill>
+        <p:spPr>
+          <a:xfrm>
+            <a:off x="8138160" y="1600200"/>
+            <a:ext cx="3566160" cy="2005965"/>
+          </a:xfrm>
+          <a:prstGeom prst="rect">
+            <a:avLst/>
+          </a:prstGeom>
+        </p:spPr>
+      </p:pic>
+      <p:sp>
+        <p:nvSpPr>
+          <p:cNvPr id="9" name="TextBox 8"/>
+          <p:cNvSpPr txBox="1"/>
+          <p:nvPr/>
+        </p:nvSpPr>
+        <p:spPr>
+          <a:xfrm>
+            <a:off x="8138160" y="3679316"/>
+            <a:ext cx="3566160" cy="640080"/>
+          </a:xfrm>
+          <a:prstGeom prst="rect">
+            <a:avLst/>
+          </a:prstGeom>
+          <a:noFill/>
+        </p:spPr>
+        <p:txBody>
+          <a:bodyPr wrap="square" anchor="t" lIns="18288" rIns="18288" tIns="18288" bIns="18288">
+            <a:spAutoFit/>
+          </a:bodyPr>
+          <a:lstStyle/>
+          <a:p>
+            <a:pPr algn="l">
+              <a:spcAft>
+                <a:spcPts val="600"/>
+              </a:spcAft>
+            </a:pPr>
+            <a:r>
+              <a:rPr sz="1300" b="0">
+                <a:solidFill>
+                  <a:srgbClr val="EEEFF1"/>
+                </a:solidFill>
+                <a:latin typeface="Segoe UI"/>
+              </a:rPr>
               <a:t>Выгрузка GeoJSON/CSV того, что на карте; запросы сохраняются и повторяются</a:t>
             </a:r>
           </a:p>
@@ -6306,7 +6369,7 @@
       </p:sp>
       <p:sp>
         <p:nvSpPr>
-          <p:cNvPr id="8" name="TextBox 7"/>
+          <p:cNvPr id="10" name="TextBox 9"/>
           <p:cNvSpPr txBox="1"/>
           <p:nvPr/>
         </p:nvSpPr>
@@ -6345,7 +6408,7 @@
       </p:sp>
       <p:sp>
         <p:nvSpPr>
-          <p:cNvPr id="9" name="TextBox 8"/>
+          <p:cNvPr id="11" name="TextBox 10"/>
           <p:cNvSpPr txBox="1"/>
           <p:nvPr/>
         </p:nvSpPr>
@@ -6384,7 +6447,7 @@
       </p:sp>
       <p:sp>
         <p:nvSpPr>
-          <p:cNvPr id="10" name="TextBox 9"/>
+          <p:cNvPr id="12" name="TextBox 11"/>
           <p:cNvSpPr txBox="1"/>
           <p:nvPr/>
         </p:nvSpPr>
